--- a/apps/keydate/pitch/KeyDate-JCI-Edmonton-CenturyGothic.pptx
+++ b/apps/keydate/pitch/KeyDate-JCI-Edmonton-CenturyGothic.pptx
@@ -1696,86 +1696,33 @@
           <a:chExt cx="0" cy="0"/>
         </a:xfrm>
       </p:grpSpPr>
-      <p:sp>
-        <p:nvSpPr>
-          <p:cNvPr id="2" name="Shape 0"/>
-          <p:cNvSpPr/>
-          <p:nvPr/>
-        </p:nvSpPr>
-        <p:spPr>
-          <a:xfrm>
-            <a:off x="685800" y="1554480"/>
-            <a:ext cx="576072" cy="576072"/>
-          </a:xfrm>
-          <a:prstGeom prst="ellipse">
-            <a:avLst/>
-          </a:prstGeom>
-          <a:solidFill>
-            <a:srgbClr val="FFFFFF">
-              <a:alpha val="0"/>
-            </a:srgbClr>
-          </a:solidFill>
-          <a:ln w="49530">
-            <a:solidFill>
-              <a:srgbClr val="E8B84B"/>
-            </a:solidFill>
-            <a:prstDash val="solid"/>
-          </a:ln>
-        </p:spPr>
-      </p:sp>
-      <p:sp>
-        <p:nvSpPr>
-          <p:cNvPr id="3" name="Shape 1"/>
-          <p:cNvSpPr/>
-          <p:nvPr/>
-        </p:nvSpPr>
-        <p:spPr>
-          <a:xfrm>
-            <a:off x="1207008" y="1787652"/>
-            <a:ext cx="630936" cy="102870"/>
-          </a:xfrm>
-          <a:prstGeom prst="rect">
-            <a:avLst/>
-          </a:prstGeom>
-          <a:solidFill>
-            <a:srgbClr val="E8B84B"/>
-          </a:solidFill>
-          <a:ln w="12700">
-            <a:solidFill>
-              <a:srgbClr val="E8B84B"/>
-            </a:solidFill>
-            <a:prstDash val="solid"/>
-          </a:ln>
-        </p:spPr>
-      </p:sp>
-      <p:sp>
-        <p:nvSpPr>
-          <p:cNvPr id="4" name="Shape 2"/>
-          <p:cNvSpPr/>
-          <p:nvPr/>
-        </p:nvSpPr>
-        <p:spPr>
-          <a:xfrm>
-            <a:off x="1591056" y="1787652"/>
-            <a:ext cx="102870" cy="274320"/>
-          </a:xfrm>
-          <a:prstGeom prst="rect">
-            <a:avLst/>
-          </a:prstGeom>
-          <a:solidFill>
-            <a:srgbClr val="E8B84B"/>
-          </a:solidFill>
-          <a:ln w="12700">
-            <a:solidFill>
-              <a:srgbClr val="E8B84B"/>
-            </a:solidFill>
-            <a:prstDash val="solid"/>
-          </a:ln>
-        </p:spPr>
-      </p:sp>
-      <p:sp>
-        <p:nvSpPr>
-          <p:cNvPr id="5" name="Text 3"/>
+      <p:pic>
+        <p:nvPicPr>
+          <p:cNvPr id="2" name="Image 0" descr="preencoded.png">    </p:cNvPr>
+          <p:cNvPicPr>
+            <a:picLocks noChangeAspect="1"/>
+          </p:cNvPicPr>
+          <p:nvPr/>
+        </p:nvPicPr>
+        <p:blipFill>
+          <a:blip r:embed="rId1"/>
+          <a:stretch>
+            <a:fillRect/>
+          </a:stretch>
+        </p:blipFill>
+        <p:spPr>
+          <a:xfrm>
+            <a:off x="685800" y="1051560"/>
+            <a:ext cx="463162" cy="987552"/>
+          </a:xfrm>
+          <a:prstGeom prst="rect">
+            <a:avLst/>
+          </a:prstGeom>
+        </p:spPr>
+      </p:pic>
+      <p:sp>
+        <p:nvSpPr>
+          <p:cNvPr id="3" name="Text 0"/>
           <p:cNvSpPr/>
           <p:nvPr/>
         </p:nvSpPr>
@@ -1828,7 +1775,7 @@
       </p:sp>
       <p:sp>
         <p:nvSpPr>
-          <p:cNvPr id="6" name="Text 4"/>
+          <p:cNvPr id="4" name="Text 1"/>
           <p:cNvSpPr/>
           <p:nvPr/>
         </p:nvSpPr>
@@ -1890,7 +1837,7 @@
       </p:sp>
       <p:sp>
         <p:nvSpPr>
-          <p:cNvPr id="7" name="Text 5"/>
+          <p:cNvPr id="5" name="Text 2"/>
           <p:cNvSpPr/>
           <p:nvPr/>
         </p:nvSpPr>
@@ -1929,7 +1876,7 @@
       </p:sp>
       <p:sp>
         <p:nvSpPr>
-          <p:cNvPr id="8" name="Text 6"/>
+          <p:cNvPr id="6" name="Text 3"/>
           <p:cNvSpPr/>
           <p:nvPr/>
         </p:nvSpPr>
@@ -1998,86 +1945,33 @@
           <a:chExt cx="0" cy="0"/>
         </a:xfrm>
       </p:grpSpPr>
-      <p:sp>
-        <p:nvSpPr>
-          <p:cNvPr id="2" name="Shape 0"/>
-          <p:cNvSpPr/>
-          <p:nvPr/>
-        </p:nvSpPr>
-        <p:spPr>
-          <a:xfrm>
-            <a:off x="685800" y="1463040"/>
-            <a:ext cx="576072" cy="576072"/>
-          </a:xfrm>
-          <a:prstGeom prst="ellipse">
-            <a:avLst/>
-          </a:prstGeom>
-          <a:solidFill>
-            <a:srgbClr val="FFFFFF">
-              <a:alpha val="0"/>
-            </a:srgbClr>
-          </a:solidFill>
-          <a:ln w="49530">
-            <a:solidFill>
-              <a:srgbClr val="E8B84B"/>
-            </a:solidFill>
-            <a:prstDash val="solid"/>
-          </a:ln>
-        </p:spPr>
-      </p:sp>
-      <p:sp>
-        <p:nvSpPr>
-          <p:cNvPr id="3" name="Shape 1"/>
-          <p:cNvSpPr/>
-          <p:nvPr/>
-        </p:nvSpPr>
-        <p:spPr>
-          <a:xfrm>
-            <a:off x="1207008" y="1696212"/>
-            <a:ext cx="630936" cy="102870"/>
-          </a:xfrm>
-          <a:prstGeom prst="rect">
-            <a:avLst/>
-          </a:prstGeom>
-          <a:solidFill>
-            <a:srgbClr val="E8B84B"/>
-          </a:solidFill>
-          <a:ln w="12700">
-            <a:solidFill>
-              <a:srgbClr val="E8B84B"/>
-            </a:solidFill>
-            <a:prstDash val="solid"/>
-          </a:ln>
-        </p:spPr>
-      </p:sp>
-      <p:sp>
-        <p:nvSpPr>
-          <p:cNvPr id="4" name="Shape 2"/>
-          <p:cNvSpPr/>
-          <p:nvPr/>
-        </p:nvSpPr>
-        <p:spPr>
-          <a:xfrm>
-            <a:off x="1591056" y="1696212"/>
-            <a:ext cx="102870" cy="274320"/>
-          </a:xfrm>
-          <a:prstGeom prst="rect">
-            <a:avLst/>
-          </a:prstGeom>
-          <a:solidFill>
-            <a:srgbClr val="E8B84B"/>
-          </a:solidFill>
-          <a:ln w="12700">
-            <a:solidFill>
-              <a:srgbClr val="E8B84B"/>
-            </a:solidFill>
-            <a:prstDash val="solid"/>
-          </a:ln>
-        </p:spPr>
-      </p:sp>
-      <p:sp>
-        <p:nvSpPr>
-          <p:cNvPr id="5" name="Text 3"/>
+      <p:pic>
+        <p:nvPicPr>
+          <p:cNvPr id="2" name="Image 0" descr="preencoded.png">    </p:cNvPr>
+          <p:cNvPicPr>
+            <a:picLocks noChangeAspect="1"/>
+          </p:cNvPicPr>
+          <p:nvPr/>
+        </p:nvPicPr>
+        <p:blipFill>
+          <a:blip r:embed="rId1"/>
+          <a:stretch>
+            <a:fillRect/>
+          </a:stretch>
+        </p:blipFill>
+        <p:spPr>
+          <a:xfrm>
+            <a:off x="685800" y="1143000"/>
+            <a:ext cx="463162" cy="987552"/>
+          </a:xfrm>
+          <a:prstGeom prst="rect">
+            <a:avLst/>
+          </a:prstGeom>
+        </p:spPr>
+      </p:pic>
+      <p:sp>
+        <p:nvSpPr>
+          <p:cNvPr id="3" name="Text 0"/>
           <p:cNvSpPr/>
           <p:nvPr/>
         </p:nvSpPr>
@@ -2139,7 +2033,7 @@
       </p:sp>
       <p:sp>
         <p:nvSpPr>
-          <p:cNvPr id="6" name="Text 4"/>
+          <p:cNvPr id="4" name="Text 1"/>
           <p:cNvSpPr/>
           <p:nvPr/>
         </p:nvSpPr>
@@ -2178,7 +2072,7 @@
       </p:sp>
       <p:sp>
         <p:nvSpPr>
-          <p:cNvPr id="7" name="Text 5"/>
+          <p:cNvPr id="5" name="Text 2"/>
           <p:cNvSpPr/>
           <p:nvPr/>
         </p:nvSpPr>
@@ -2217,7 +2111,7 @@
       </p:sp>
       <p:sp>
         <p:nvSpPr>
-          <p:cNvPr id="8" name="Text 6"/>
+          <p:cNvPr id="6" name="Text 3"/>
           <p:cNvSpPr/>
           <p:nvPr/>
         </p:nvSpPr>
@@ -2633,86 +2527,33 @@
           <a:chExt cx="0" cy="0"/>
         </a:xfrm>
       </p:grpSpPr>
-      <p:sp>
-        <p:nvSpPr>
-          <p:cNvPr id="2" name="Shape 0"/>
-          <p:cNvSpPr/>
-          <p:nvPr/>
-        </p:nvSpPr>
-        <p:spPr>
-          <a:xfrm>
-            <a:off x="685800" y="1188720"/>
-            <a:ext cx="384048" cy="384048"/>
-          </a:xfrm>
-          <a:prstGeom prst="ellipse">
-            <a:avLst/>
-          </a:prstGeom>
-          <a:solidFill>
-            <a:srgbClr val="FFFFFF">
-              <a:alpha val="0"/>
-            </a:srgbClr>
-          </a:solidFill>
-          <a:ln w="33020">
-            <a:solidFill>
-              <a:srgbClr val="E8B84B"/>
-            </a:solidFill>
-            <a:prstDash val="solid"/>
-          </a:ln>
-        </p:spPr>
-      </p:sp>
-      <p:sp>
-        <p:nvSpPr>
-          <p:cNvPr id="3" name="Shape 1"/>
-          <p:cNvSpPr/>
-          <p:nvPr/>
-        </p:nvSpPr>
-        <p:spPr>
-          <a:xfrm>
-            <a:off x="1033272" y="1344168"/>
-            <a:ext cx="420624" cy="68580"/>
-          </a:xfrm>
-          <a:prstGeom prst="rect">
-            <a:avLst/>
-          </a:prstGeom>
-          <a:solidFill>
-            <a:srgbClr val="E8B84B"/>
-          </a:solidFill>
-          <a:ln w="12700">
-            <a:solidFill>
-              <a:srgbClr val="E8B84B"/>
-            </a:solidFill>
-            <a:prstDash val="solid"/>
-          </a:ln>
-        </p:spPr>
-      </p:sp>
-      <p:sp>
-        <p:nvSpPr>
-          <p:cNvPr id="4" name="Shape 2"/>
-          <p:cNvSpPr/>
-          <p:nvPr/>
-        </p:nvSpPr>
-        <p:spPr>
-          <a:xfrm>
-            <a:off x="1289304" y="1344168"/>
-            <a:ext cx="68580" cy="182880"/>
-          </a:xfrm>
-          <a:prstGeom prst="rect">
-            <a:avLst/>
-          </a:prstGeom>
-          <a:solidFill>
-            <a:srgbClr val="E8B84B"/>
-          </a:solidFill>
-          <a:ln w="12700">
-            <a:solidFill>
-              <a:srgbClr val="E8B84B"/>
-            </a:solidFill>
-            <a:prstDash val="solid"/>
-          </a:ln>
-        </p:spPr>
-      </p:sp>
-      <p:sp>
-        <p:nvSpPr>
-          <p:cNvPr id="5" name="Text 3"/>
+      <p:pic>
+        <p:nvPicPr>
+          <p:cNvPr id="2" name="Image 0" descr="preencoded.png">    </p:cNvPr>
+          <p:cNvPicPr>
+            <a:picLocks noChangeAspect="1"/>
+          </p:cNvPicPr>
+          <p:nvPr/>
+        </p:nvPicPr>
+        <p:blipFill>
+          <a:blip r:embed="rId1"/>
+          <a:stretch>
+            <a:fillRect/>
+          </a:stretch>
+        </p:blipFill>
+        <p:spPr>
+          <a:xfrm>
+            <a:off x="685800" y="1097280"/>
+            <a:ext cx="308775" cy="658368"/>
+          </a:xfrm>
+          <a:prstGeom prst="rect">
+            <a:avLst/>
+          </a:prstGeom>
+        </p:spPr>
+      </p:pic>
+      <p:sp>
+        <p:nvSpPr>
+          <p:cNvPr id="3" name="Text 0"/>
           <p:cNvSpPr/>
           <p:nvPr/>
         </p:nvSpPr>
@@ -2751,7 +2592,7 @@
       </p:sp>
       <p:sp>
         <p:nvSpPr>
-          <p:cNvPr id="6" name="Shape 4"/>
+          <p:cNvPr id="4" name="Shape 1"/>
           <p:cNvSpPr/>
           <p:nvPr/>
         </p:nvSpPr>
@@ -2776,7 +2617,7 @@
       </p:sp>
       <p:sp>
         <p:nvSpPr>
-          <p:cNvPr id="7" name="Text 5"/>
+          <p:cNvPr id="5" name="Text 2"/>
           <p:cNvSpPr/>
           <p:nvPr/>
         </p:nvSpPr>
@@ -2815,7 +2656,7 @@
       </p:sp>
       <p:sp>
         <p:nvSpPr>
-          <p:cNvPr id="8" name="Shape 6"/>
+          <p:cNvPr id="6" name="Shape 3"/>
           <p:cNvSpPr/>
           <p:nvPr/>
         </p:nvSpPr>
@@ -2840,7 +2681,7 @@
       </p:sp>
       <p:sp>
         <p:nvSpPr>
-          <p:cNvPr id="9" name="Text 7"/>
+          <p:cNvPr id="7" name="Text 4"/>
           <p:cNvSpPr/>
           <p:nvPr/>
         </p:nvSpPr>
@@ -2879,7 +2720,7 @@
       </p:sp>
       <p:sp>
         <p:nvSpPr>
-          <p:cNvPr id="10" name="Shape 8"/>
+          <p:cNvPr id="8" name="Shape 5"/>
           <p:cNvSpPr/>
           <p:nvPr/>
         </p:nvSpPr>
@@ -2904,7 +2745,7 @@
       </p:sp>
       <p:sp>
         <p:nvSpPr>
-          <p:cNvPr id="11" name="Text 9"/>
+          <p:cNvPr id="9" name="Text 6"/>
           <p:cNvSpPr/>
           <p:nvPr/>
         </p:nvSpPr>

--- a/apps/keydate/pitch/KeyDate-JCI-Edmonton-CenturyGothic.pptx
+++ b/apps/keydate/pitch/KeyDate-JCI-Edmonton-CenturyGothic.pptx
@@ -1712,7 +1712,7 @@
         </p:blipFill>
         <p:spPr>
           <a:xfrm>
-            <a:off x="685800" y="1051560"/>
+            <a:off x="685800" y="960120"/>
             <a:ext cx="463162" cy="987552"/>
           </a:xfrm>
           <a:prstGeom prst="rect">
@@ -1728,7 +1728,7 @@
         </p:nvSpPr>
         <p:spPr>
           <a:xfrm>
-            <a:off x="685800" y="2240280"/>
+            <a:off x="685800" y="2148840"/>
             <a:ext cx="8229600" cy="1005840"/>
           </a:xfrm>
           <a:prstGeom prst="rect">
@@ -1781,7 +1781,7 @@
         </p:nvSpPr>
         <p:spPr>
           <a:xfrm>
-            <a:off x="685800" y="3337560"/>
+            <a:off x="685800" y="3246120"/>
             <a:ext cx="9144000" cy="1463040"/>
           </a:xfrm>
           <a:prstGeom prst="rect">
@@ -1843,7 +1843,7 @@
         </p:nvSpPr>
         <p:spPr>
           <a:xfrm>
-            <a:off x="685800" y="5760720"/>
+            <a:off x="685800" y="5989320"/>
             <a:ext cx="7315200" cy="320040"/>
           </a:xfrm>
           <a:prstGeom prst="rect">
@@ -1882,7 +1882,7 @@
         </p:nvSpPr>
         <p:spPr>
           <a:xfrm>
-            <a:off x="8759952" y="5760720"/>
+            <a:off x="8759952" y="5989320"/>
             <a:ext cx="2743200" cy="320040"/>
           </a:xfrm>
           <a:prstGeom prst="rect">
@@ -1961,7 +1961,7 @@
         </p:blipFill>
         <p:spPr>
           <a:xfrm>
-            <a:off x="685800" y="1143000"/>
+            <a:off x="685800" y="960120"/>
             <a:ext cx="463162" cy="987552"/>
           </a:xfrm>
           <a:prstGeom prst="rect">
@@ -1977,7 +1977,7 @@
         </p:nvSpPr>
         <p:spPr>
           <a:xfrm>
-            <a:off x="685800" y="2377440"/>
+            <a:off x="685800" y="1965960"/>
             <a:ext cx="10607040" cy="1645920"/>
           </a:xfrm>
           <a:prstGeom prst="rect">
@@ -2039,7 +2039,7 @@
         </p:nvSpPr>
         <p:spPr>
           <a:xfrm>
-            <a:off x="685800" y="4206240"/>
+            <a:off x="685800" y="3977640"/>
             <a:ext cx="10607040" cy="1005840"/>
           </a:xfrm>
           <a:prstGeom prst="rect">
@@ -2078,7 +2078,7 @@
         </p:nvSpPr>
         <p:spPr>
           <a:xfrm>
-            <a:off x="685800" y="5760720"/>
+            <a:off x="685800" y="5989320"/>
             <a:ext cx="5486400" cy="365760"/>
           </a:xfrm>
           <a:prstGeom prst="rect">
@@ -2117,7 +2117,7 @@
         </p:nvSpPr>
         <p:spPr>
           <a:xfrm>
-            <a:off x="6931152" y="5760720"/>
+            <a:off x="6931152" y="5989320"/>
             <a:ext cx="4572000" cy="365760"/>
           </a:xfrm>
           <a:prstGeom prst="rect">
@@ -2227,7 +2227,7 @@
         </p:nvSpPr>
         <p:spPr>
           <a:xfrm>
-            <a:off x="685800" y="1691640"/>
+            <a:off x="685800" y="1965960"/>
             <a:ext cx="10607040" cy="1005840"/>
           </a:xfrm>
           <a:prstGeom prst="rect">
@@ -2266,7 +2266,7 @@
         </p:nvSpPr>
         <p:spPr>
           <a:xfrm>
-            <a:off x="685800" y="2788920"/>
+            <a:off x="685800" y="3063240"/>
             <a:ext cx="10607040" cy="914400"/>
           </a:xfrm>
           <a:prstGeom prst="rect">
@@ -2305,12 +2305,12 @@
         </p:nvSpPr>
         <p:spPr>
           <a:xfrm>
-            <a:off x="685800" y="4297680"/>
-            <a:ext cx="3364992" cy="777240"/>
+            <a:off x="685800" y="4480560"/>
+            <a:ext cx="3364992" cy="822960"/>
           </a:xfrm>
           <a:prstGeom prst="roundRect">
             <a:avLst>
-              <a:gd name="adj" fmla="val 16471"/>
+              <a:gd name="adj" fmla="val 15556"/>
             </a:avLst>
           </a:prstGeom>
           <a:solidFill>
@@ -2332,8 +2332,8 @@
         </p:nvSpPr>
         <p:spPr>
           <a:xfrm>
-            <a:off x="685800" y="4297680"/>
-            <a:ext cx="3364992" cy="777240"/>
+            <a:off x="685800" y="4480560"/>
+            <a:ext cx="3364992" cy="822960"/>
           </a:xfrm>
           <a:prstGeom prst="rect">
             <a:avLst/>
@@ -2371,12 +2371,12 @@
         </p:nvSpPr>
         <p:spPr>
           <a:xfrm>
-            <a:off x="4306824" y="4297680"/>
-            <a:ext cx="3364992" cy="777240"/>
+            <a:off x="4306824" y="4480560"/>
+            <a:ext cx="3364992" cy="822960"/>
           </a:xfrm>
           <a:prstGeom prst="roundRect">
             <a:avLst>
-              <a:gd name="adj" fmla="val 16471"/>
+              <a:gd name="adj" fmla="val 15556"/>
             </a:avLst>
           </a:prstGeom>
           <a:solidFill>
@@ -2398,8 +2398,8 @@
         </p:nvSpPr>
         <p:spPr>
           <a:xfrm>
-            <a:off x="4306824" y="4297680"/>
-            <a:ext cx="3364992" cy="777240"/>
+            <a:off x="4306824" y="4480560"/>
+            <a:ext cx="3364992" cy="822960"/>
           </a:xfrm>
           <a:prstGeom prst="rect">
             <a:avLst/>
@@ -2437,12 +2437,12 @@
         </p:nvSpPr>
         <p:spPr>
           <a:xfrm>
-            <a:off x="7927848" y="4297680"/>
-            <a:ext cx="3364992" cy="777240"/>
+            <a:off x="7927848" y="4480560"/>
+            <a:ext cx="3364992" cy="822960"/>
           </a:xfrm>
           <a:prstGeom prst="roundRect">
             <a:avLst>
-              <a:gd name="adj" fmla="val 16471"/>
+              <a:gd name="adj" fmla="val 15556"/>
             </a:avLst>
           </a:prstGeom>
           <a:solidFill>
@@ -2464,8 +2464,8 @@
         </p:nvSpPr>
         <p:spPr>
           <a:xfrm>
-            <a:off x="7927848" y="4297680"/>
-            <a:ext cx="3364992" cy="777240"/>
+            <a:off x="7927848" y="4480560"/>
+            <a:ext cx="3364992" cy="822960"/>
           </a:xfrm>
           <a:prstGeom prst="rect">
             <a:avLst/>
@@ -2543,7 +2543,7 @@
         </p:blipFill>
         <p:spPr>
           <a:xfrm>
-            <a:off x="685800" y="1097280"/>
+            <a:off x="685800" y="960120"/>
             <a:ext cx="308775" cy="658368"/>
           </a:xfrm>
           <a:prstGeom prst="rect">
@@ -2598,7 +2598,7 @@
         </p:nvSpPr>
         <p:spPr>
           <a:xfrm>
-            <a:off x="731520" y="3557016"/>
+            <a:off x="731520" y="3648456"/>
             <a:ext cx="164592" cy="164592"/>
           </a:xfrm>
           <a:prstGeom prst="ellipse">
@@ -2623,7 +2623,7 @@
         </p:nvSpPr>
         <p:spPr>
           <a:xfrm>
-            <a:off x="1188720" y="3429000"/>
+            <a:off x="1188720" y="3520440"/>
             <a:ext cx="9875520" cy="502920"/>
           </a:xfrm>
           <a:prstGeom prst="rect">
@@ -2662,7 +2662,7 @@
         </p:nvSpPr>
         <p:spPr>
           <a:xfrm>
-            <a:off x="731520" y="4306824"/>
+            <a:off x="731520" y="4398264"/>
             <a:ext cx="164592" cy="164592"/>
           </a:xfrm>
           <a:prstGeom prst="ellipse">
@@ -2687,7 +2687,7 @@
         </p:nvSpPr>
         <p:spPr>
           <a:xfrm>
-            <a:off x="1188720" y="4178808"/>
+            <a:off x="1188720" y="4270248"/>
             <a:ext cx="9875520" cy="502920"/>
           </a:xfrm>
           <a:prstGeom prst="rect">
@@ -2726,7 +2726,7 @@
         </p:nvSpPr>
         <p:spPr>
           <a:xfrm>
-            <a:off x="731520" y="5056632"/>
+            <a:off x="731520" y="5148072"/>
             <a:ext cx="164592" cy="164592"/>
           </a:xfrm>
           <a:prstGeom prst="ellipse">
@@ -2751,7 +2751,7 @@
         </p:nvSpPr>
         <p:spPr>
           <a:xfrm>
-            <a:off x="1188720" y="4928616"/>
+            <a:off x="1188720" y="5020056"/>
             <a:ext cx="9875520" cy="502920"/>
           </a:xfrm>
           <a:prstGeom prst="rect">
@@ -2861,7 +2861,7 @@
         </p:nvSpPr>
         <p:spPr>
           <a:xfrm>
-            <a:off x="685800" y="914400"/>
+            <a:off x="685800" y="960120"/>
             <a:ext cx="10607040" cy="822960"/>
           </a:xfrm>
           <a:prstGeom prst="rect">
@@ -2901,11 +2901,11 @@
         <p:spPr>
           <a:xfrm>
             <a:off x="685800" y="2240280"/>
-            <a:ext cx="4951476" cy="2148840"/>
+            <a:ext cx="4951476" cy="2834640"/>
           </a:xfrm>
           <a:prstGeom prst="roundRect">
             <a:avLst>
-              <a:gd name="adj" fmla="val 5957"/>
+              <a:gd name="adj" fmla="val 4516"/>
             </a:avLst>
           </a:prstGeom>
           <a:solidFill>
@@ -2927,7 +2927,7 @@
         </p:nvSpPr>
         <p:spPr>
           <a:xfrm>
-            <a:off x="1097280" y="2532888"/>
+            <a:off x="1097280" y="2624328"/>
             <a:ext cx="2743200" cy="347472"/>
           </a:xfrm>
           <a:prstGeom prst="rect">
@@ -2966,7 +2966,7 @@
         </p:nvSpPr>
         <p:spPr>
           <a:xfrm>
-            <a:off x="1097280" y="3017520"/>
+            <a:off x="1097280" y="3200400"/>
             <a:ext cx="4114800" cy="914400"/>
           </a:xfrm>
           <a:prstGeom prst="rect">
@@ -3006,11 +3006,11 @@
         <p:spPr>
           <a:xfrm>
             <a:off x="6551676" y="2240280"/>
-            <a:ext cx="4951476" cy="2148840"/>
+            <a:ext cx="4951476" cy="2834640"/>
           </a:xfrm>
           <a:prstGeom prst="roundRect">
             <a:avLst>
-              <a:gd name="adj" fmla="val 5957"/>
+              <a:gd name="adj" fmla="val 4516"/>
             </a:avLst>
           </a:prstGeom>
           <a:solidFill>
@@ -3032,7 +3032,7 @@
         </p:nvSpPr>
         <p:spPr>
           <a:xfrm>
-            <a:off x="6963156" y="2532888"/>
+            <a:off x="6963156" y="2624328"/>
             <a:ext cx="2743200" cy="347472"/>
           </a:xfrm>
           <a:prstGeom prst="rect">
@@ -3071,7 +3071,7 @@
         </p:nvSpPr>
         <p:spPr>
           <a:xfrm>
-            <a:off x="6963156" y="3017520"/>
+            <a:off x="6963156" y="3200400"/>
             <a:ext cx="4114800" cy="914400"/>
           </a:xfrm>
           <a:prstGeom prst="rect">
@@ -3110,7 +3110,7 @@
         </p:nvSpPr>
         <p:spPr>
           <a:xfrm>
-            <a:off x="5637276" y="3108960"/>
+            <a:off x="5637276" y="3383280"/>
             <a:ext cx="914400" cy="548640"/>
           </a:xfrm>
           <a:prstGeom prst="rect">
@@ -3149,8 +3149,8 @@
         </p:nvSpPr>
         <p:spPr>
           <a:xfrm>
-            <a:off x="685800" y="4709160"/>
-            <a:ext cx="10607040" cy="365760"/>
+            <a:off x="1097280" y="4361688"/>
+            <a:ext cx="4114800" cy="320040"/>
           </a:xfrm>
           <a:prstGeom prst="rect">
             <a:avLst/>
@@ -3166,7 +3166,7 @@
               <a:buNone/>
             </a:pPr>
             <a:r>
-              <a:rPr lang="en-US" sz="1500" dirty="0">
+              <a:rPr lang="en-US" sz="1300" dirty="0">
                 <a:solidFill>
                   <a:srgbClr val="5C6F66"/>
                 </a:solidFill>
@@ -3174,9 +3174,9 @@
                 <a:ea typeface="Century Gothic" pitchFamily="34" charset="-122"/>
                 <a:cs typeface="Century Gothic" pitchFamily="34" charset="-120"/>
               </a:rPr>
-              <a:t>Average Canadian home</a:t>
-            </a:r>
-            <a:endParaRPr lang="en-US" sz="1500" dirty="0"/>
+              <a:t>average Canadian home</a:t>
+            </a:r>
+            <a:endParaRPr lang="en-US" sz="1300" dirty="0"/>
           </a:p>
         </p:txBody>
       </p:sp>
@@ -3188,7 +3188,46 @@
         </p:nvSpPr>
         <p:spPr>
           <a:xfrm>
-            <a:off x="685800" y="6035040"/>
+            <a:off x="6963156" y="4361688"/>
+            <a:ext cx="4114800" cy="320040"/>
+          </a:xfrm>
+          <a:prstGeom prst="rect">
+            <a:avLst/>
+          </a:prstGeom>
+          <a:noFill/>
+          <a:ln/>
+        </p:spPr>
+        <p:txBody>
+          <a:bodyPr wrap="square" lIns="0" tIns="0" rIns="0" bIns="0" rtlCol="0" anchor="ctr"/>
+          <a:lstStyle/>
+          <a:p>
+            <a:pPr indent="0" marL="0">
+              <a:buNone/>
+            </a:pPr>
+            <a:r>
+              <a:rPr lang="en-US" sz="1300" dirty="0">
+                <a:solidFill>
+                  <a:srgbClr val="E3F2E9"/>
+                </a:solidFill>
+                <a:latin typeface="Century Gothic" pitchFamily="34" charset="0"/>
+                <a:ea typeface="Century Gothic" pitchFamily="34" charset="-122"/>
+                <a:cs typeface="Century Gothic" pitchFamily="34" charset="-120"/>
+              </a:rPr>
+              <a:t>average Canadian home</a:t>
+            </a:r>
+            <a:endParaRPr lang="en-US" sz="1300" dirty="0"/>
+          </a:p>
+        </p:txBody>
+      </p:sp>
+      <p:sp>
+        <p:nvSpPr>
+          <p:cNvPr id="13" name="Text 11"/>
+          <p:cNvSpPr/>
+          <p:nvPr/>
+        </p:nvSpPr>
+        <p:spPr>
+          <a:xfrm>
+            <a:off x="685800" y="6172200"/>
             <a:ext cx="10607040" cy="274320"/>
           </a:xfrm>
           <a:prstGeom prst="rect">
@@ -3298,7 +3337,7 @@
         </p:nvSpPr>
         <p:spPr>
           <a:xfrm>
-            <a:off x="685800" y="914400"/>
+            <a:off x="685800" y="960120"/>
             <a:ext cx="10607040" cy="822960"/>
           </a:xfrm>
           <a:prstGeom prst="rect">
@@ -3337,7 +3376,7 @@
         </p:nvSpPr>
         <p:spPr>
           <a:xfrm>
-            <a:off x="685800" y="2331720"/>
+            <a:off x="685800" y="2240280"/>
             <a:ext cx="640080" cy="640080"/>
           </a:xfrm>
           <a:prstGeom prst="ellipse">
@@ -3362,7 +3401,7 @@
         </p:nvSpPr>
         <p:spPr>
           <a:xfrm>
-            <a:off x="685800" y="2331720"/>
+            <a:off x="685800" y="2240280"/>
             <a:ext cx="640080" cy="640080"/>
           </a:xfrm>
           <a:prstGeom prst="rect">
@@ -3401,7 +3440,7 @@
         </p:nvSpPr>
         <p:spPr>
           <a:xfrm>
-            <a:off x="1645920" y="2377440"/>
+            <a:off x="1645920" y="2286000"/>
             <a:ext cx="5852160" cy="548640"/>
           </a:xfrm>
           <a:prstGeom prst="rect">
@@ -3440,7 +3479,7 @@
         </p:nvSpPr>
         <p:spPr>
           <a:xfrm>
-            <a:off x="685800" y="3429000"/>
+            <a:off x="685800" y="3337560"/>
             <a:ext cx="640080" cy="640080"/>
           </a:xfrm>
           <a:prstGeom prst="ellipse">
@@ -3465,7 +3504,7 @@
         </p:nvSpPr>
         <p:spPr>
           <a:xfrm>
-            <a:off x="685800" y="3429000"/>
+            <a:off x="685800" y="3337560"/>
             <a:ext cx="640080" cy="640080"/>
           </a:xfrm>
           <a:prstGeom prst="rect">
@@ -3504,7 +3543,7 @@
         </p:nvSpPr>
         <p:spPr>
           <a:xfrm>
-            <a:off x="1645920" y="3474720"/>
+            <a:off x="1645920" y="3383280"/>
             <a:ext cx="5852160" cy="548640"/>
           </a:xfrm>
           <a:prstGeom prst="rect">
@@ -3543,7 +3582,7 @@
         </p:nvSpPr>
         <p:spPr>
           <a:xfrm>
-            <a:off x="685800" y="4526280"/>
+            <a:off x="685800" y="4434840"/>
             <a:ext cx="640080" cy="640080"/>
           </a:xfrm>
           <a:prstGeom prst="ellipse">
@@ -3568,7 +3607,7 @@
         </p:nvSpPr>
         <p:spPr>
           <a:xfrm>
-            <a:off x="685800" y="4526280"/>
+            <a:off x="685800" y="4434840"/>
             <a:ext cx="640080" cy="640080"/>
           </a:xfrm>
           <a:prstGeom prst="rect">
@@ -3607,7 +3646,7 @@
         </p:nvSpPr>
         <p:spPr>
           <a:xfrm>
-            <a:off x="1645920" y="4572000"/>
+            <a:off x="1645920" y="4480560"/>
             <a:ext cx="5852160" cy="548640"/>
           </a:xfrm>
           <a:prstGeom prst="rect">
@@ -3654,7 +3693,7 @@
         </p:blipFill>
         <p:spPr>
           <a:xfrm>
-            <a:off x="8028432" y="1783080"/>
+            <a:off x="8211312" y="2240280"/>
             <a:ext cx="3291840" cy="3657600"/>
           </a:xfrm>
           <a:prstGeom prst="rect">
@@ -3677,7 +3716,7 @@
         </p:nvSpPr>
         <p:spPr>
           <a:xfrm>
-            <a:off x="8028432" y="5532120"/>
+            <a:off x="8211312" y="5989320"/>
             <a:ext cx="3291840" cy="320040"/>
           </a:xfrm>
           <a:prstGeom prst="rect">
@@ -3787,7 +3826,7 @@
         </p:nvSpPr>
         <p:spPr>
           <a:xfrm>
-            <a:off x="685800" y="914400"/>
+            <a:off x="685800" y="960120"/>
             <a:ext cx="10607040" cy="822960"/>
           </a:xfrm>
           <a:prstGeom prst="rect">
@@ -3826,12 +3865,12 @@
         </p:nvSpPr>
         <p:spPr>
           <a:xfrm>
-            <a:off x="685800" y="2286000"/>
-            <a:ext cx="5074920" cy="2743200"/>
+            <a:off x="685800" y="2240280"/>
+            <a:ext cx="5074920" cy="3154680"/>
           </a:xfrm>
           <a:prstGeom prst="roundRect">
             <a:avLst>
-              <a:gd name="adj" fmla="val 5333"/>
+              <a:gd name="adj" fmla="val 4638"/>
             </a:avLst>
           </a:prstGeom>
           <a:solidFill>
@@ -3853,7 +3892,7 @@
         </p:nvSpPr>
         <p:spPr>
           <a:xfrm>
-            <a:off x="1143000" y="2651760"/>
+            <a:off x="1143000" y="2697480"/>
             <a:ext cx="4206240" cy="274320"/>
           </a:xfrm>
           <a:prstGeom prst="rect">
@@ -3892,7 +3931,7 @@
         </p:nvSpPr>
         <p:spPr>
           <a:xfrm>
-            <a:off x="1143000" y="3063240"/>
+            <a:off x="1143000" y="3200400"/>
             <a:ext cx="4297680" cy="640080"/>
           </a:xfrm>
           <a:prstGeom prst="rect">
@@ -3931,7 +3970,7 @@
         </p:nvSpPr>
         <p:spPr>
           <a:xfrm>
-            <a:off x="1143000" y="3977640"/>
+            <a:off x="1143000" y="4297680"/>
             <a:ext cx="4206240" cy="640080"/>
           </a:xfrm>
           <a:prstGeom prst="rect">
@@ -3970,12 +4009,12 @@
         </p:nvSpPr>
         <p:spPr>
           <a:xfrm>
-            <a:off x="6217920" y="2286000"/>
-            <a:ext cx="5074920" cy="2743200"/>
+            <a:off x="6217920" y="2240280"/>
+            <a:ext cx="5074920" cy="3154680"/>
           </a:xfrm>
           <a:prstGeom prst="roundRect">
             <a:avLst>
-              <a:gd name="adj" fmla="val 5333"/>
+              <a:gd name="adj" fmla="val 4638"/>
             </a:avLst>
           </a:prstGeom>
           <a:solidFill>
@@ -3997,7 +4036,7 @@
         </p:nvSpPr>
         <p:spPr>
           <a:xfrm>
-            <a:off x="6675120" y="2651760"/>
+            <a:off x="6675120" y="2697480"/>
             <a:ext cx="4206240" cy="274320"/>
           </a:xfrm>
           <a:prstGeom prst="rect">
@@ -4036,7 +4075,7 @@
         </p:nvSpPr>
         <p:spPr>
           <a:xfrm>
-            <a:off x="6675120" y="3063240"/>
+            <a:off x="6675120" y="3200400"/>
             <a:ext cx="4297680" cy="640080"/>
           </a:xfrm>
           <a:prstGeom prst="rect">
@@ -4075,7 +4114,7 @@
         </p:nvSpPr>
         <p:spPr>
           <a:xfrm>
-            <a:off x="6675120" y="3977640"/>
+            <a:off x="6675120" y="4297680"/>
             <a:ext cx="4206240" cy="640080"/>
           </a:xfrm>
           <a:prstGeom prst="rect">
@@ -4185,7 +4224,7 @@
         </p:nvSpPr>
         <p:spPr>
           <a:xfrm>
-            <a:off x="685800" y="914400"/>
+            <a:off x="685800" y="960120"/>
             <a:ext cx="10607040" cy="822960"/>
           </a:xfrm>
           <a:prstGeom prst="rect">
@@ -4224,7 +4263,7 @@
         </p:nvSpPr>
         <p:spPr>
           <a:xfrm>
-            <a:off x="685800" y="2423160"/>
+            <a:off x="685800" y="2240280"/>
             <a:ext cx="1975104" cy="1051560"/>
           </a:xfrm>
           <a:prstGeom prst="roundRect">
@@ -4251,7 +4290,7 @@
         </p:nvSpPr>
         <p:spPr>
           <a:xfrm>
-            <a:off x="685800" y="2423160"/>
+            <a:off x="685800" y="2240280"/>
             <a:ext cx="1975104" cy="1051560"/>
           </a:xfrm>
           <a:prstGeom prst="rect">
@@ -4290,7 +4329,7 @@
         </p:nvSpPr>
         <p:spPr>
           <a:xfrm>
-            <a:off x="2807208" y="2423160"/>
+            <a:off x="2807208" y="2240280"/>
             <a:ext cx="1975104" cy="1051560"/>
           </a:xfrm>
           <a:prstGeom prst="roundRect">
@@ -4317,7 +4356,7 @@
         </p:nvSpPr>
         <p:spPr>
           <a:xfrm>
-            <a:off x="2807208" y="2423160"/>
+            <a:off x="2807208" y="2240280"/>
             <a:ext cx="1975104" cy="1051560"/>
           </a:xfrm>
           <a:prstGeom prst="rect">
@@ -4356,7 +4395,7 @@
         </p:nvSpPr>
         <p:spPr>
           <a:xfrm>
-            <a:off x="4928616" y="2423160"/>
+            <a:off x="4928616" y="2240280"/>
             <a:ext cx="1975104" cy="1051560"/>
           </a:xfrm>
           <a:prstGeom prst="roundRect">
@@ -4383,7 +4422,7 @@
         </p:nvSpPr>
         <p:spPr>
           <a:xfrm>
-            <a:off x="4928616" y="2423160"/>
+            <a:off x="4928616" y="2240280"/>
             <a:ext cx="1975104" cy="1051560"/>
           </a:xfrm>
           <a:prstGeom prst="rect">
@@ -4422,7 +4461,7 @@
         </p:nvSpPr>
         <p:spPr>
           <a:xfrm>
-            <a:off x="7050024" y="2423160"/>
+            <a:off x="7050024" y="2240280"/>
             <a:ext cx="1975104" cy="1051560"/>
           </a:xfrm>
           <a:prstGeom prst="roundRect">
@@ -4449,7 +4488,7 @@
         </p:nvSpPr>
         <p:spPr>
           <a:xfrm>
-            <a:off x="7050024" y="2423160"/>
+            <a:off x="7050024" y="2240280"/>
             <a:ext cx="1975104" cy="1051560"/>
           </a:xfrm>
           <a:prstGeom prst="rect">
@@ -4488,7 +4527,7 @@
         </p:nvSpPr>
         <p:spPr>
           <a:xfrm>
-            <a:off x="9171432" y="2423160"/>
+            <a:off x="9171432" y="2240280"/>
             <a:ext cx="1975104" cy="1051560"/>
           </a:xfrm>
           <a:prstGeom prst="roundRect">
@@ -4515,7 +4554,7 @@
         </p:nvSpPr>
         <p:spPr>
           <a:xfrm>
-            <a:off x="9171432" y="2423160"/>
+            <a:off x="9171432" y="2240280"/>
             <a:ext cx="1975104" cy="1051560"/>
           </a:xfrm>
           <a:prstGeom prst="rect">
@@ -4554,7 +4593,7 @@
         </p:nvSpPr>
         <p:spPr>
           <a:xfrm>
-            <a:off x="685800" y="4114800"/>
+            <a:off x="685800" y="3840480"/>
             <a:ext cx="10607040" cy="1371600"/>
           </a:xfrm>
           <a:prstGeom prst="roundRect">
@@ -4581,7 +4620,7 @@
         </p:nvSpPr>
         <p:spPr>
           <a:xfrm>
-            <a:off x="1234440" y="4114800"/>
+            <a:off x="1234440" y="3840480"/>
             <a:ext cx="9509760" cy="1371600"/>
           </a:xfrm>
           <a:prstGeom prst="rect">
@@ -4705,7 +4744,7 @@
         </p:nvSpPr>
         <p:spPr>
           <a:xfrm>
-            <a:off x="685800" y="914400"/>
+            <a:off x="685800" y="960120"/>
             <a:ext cx="10607040" cy="822960"/>
           </a:xfrm>
           <a:prstGeom prst="rect">
@@ -4744,7 +4783,7 @@
         </p:nvSpPr>
         <p:spPr>
           <a:xfrm>
-            <a:off x="685800" y="2103120"/>
+            <a:off x="685800" y="2240280"/>
             <a:ext cx="5760720" cy="1417320"/>
           </a:xfrm>
           <a:prstGeom prst="roundRect">
@@ -4771,7 +4810,7 @@
         </p:nvSpPr>
         <p:spPr>
           <a:xfrm>
-            <a:off x="1143000" y="2103120"/>
+            <a:off x="1143000" y="2240280"/>
             <a:ext cx="4937760" cy="1417320"/>
           </a:xfrm>
           <a:prstGeom prst="rect">
@@ -4796,10 +4835,27 @@
                 <a:ea typeface="Century Gothic" pitchFamily="34" charset="-122"/>
                 <a:cs typeface="Century Gothic" pitchFamily="34" charset="-120"/>
               </a:rPr>
-              <a:t>We never sell you to brokers.</a:t>
+              <a:t>We never sell you</a:t>
             </a:r>
             <a:endParaRPr lang="en-US" sz="2300" dirty="0"/>
           </a:p>
+          <a:p>
+            <a:pPr indent="0" marL="0">
+              <a:buNone/>
+            </a:pPr>
+            <a:r>
+              <a:rPr lang="en-US" sz="2300" b="1" dirty="0">
+                <a:solidFill>
+                  <a:srgbClr val="FFFFFF"/>
+                </a:solidFill>
+                <a:latin typeface="Century Gothic" pitchFamily="34" charset="0"/>
+                <a:ea typeface="Century Gothic" pitchFamily="34" charset="-122"/>
+                <a:cs typeface="Century Gothic" pitchFamily="34" charset="-120"/>
+              </a:rPr>
+              <a:t>to brokers.</a:t>
+            </a:r>
+            <a:endParaRPr lang="en-US" sz="2300" dirty="0"/>
+          </a:p>
         </p:txBody>
       </p:sp>
       <p:sp>
@@ -4810,7 +4866,7 @@
         </p:nvSpPr>
         <p:spPr>
           <a:xfrm>
-            <a:off x="685800" y="3703320"/>
+            <a:off x="685800" y="3840480"/>
             <a:ext cx="5760720" cy="1417320"/>
           </a:xfrm>
           <a:prstGeom prst="roundRect">
@@ -4837,7 +4893,7 @@
         </p:nvSpPr>
         <p:spPr>
           <a:xfrm>
-            <a:off x="1143000" y="3703320"/>
+            <a:off x="1143000" y="3840480"/>
             <a:ext cx="4937760" cy="1417320"/>
           </a:xfrm>
           <a:prstGeom prst="rect">
@@ -4862,7 +4918,24 @@
                 <a:ea typeface="Century Gothic" pitchFamily="34" charset="-122"/>
                 <a:cs typeface="Century Gothic" pitchFamily="34" charset="-120"/>
               </a:rPr>
-              <a:t>We built the tool that says don’t buy.</a:t>
+              <a:t>We built the tool</a:t>
+            </a:r>
+            <a:endParaRPr lang="en-US" sz="2300" dirty="0"/>
+          </a:p>
+          <a:p>
+            <a:pPr indent="0" marL="0">
+              <a:buNone/>
+            </a:pPr>
+            <a:r>
+              <a:rPr lang="en-US" sz="2300" b="1" dirty="0">
+                <a:solidFill>
+                  <a:srgbClr val="FFFFFF"/>
+                </a:solidFill>
+                <a:latin typeface="Century Gothic" pitchFamily="34" charset="0"/>
+                <a:ea typeface="Century Gothic" pitchFamily="34" charset="-122"/>
+                <a:cs typeface="Century Gothic" pitchFamily="34" charset="-120"/>
+              </a:rPr>
+              <a:t>that says don’t buy.</a:t>
             </a:r>
             <a:endParaRPr lang="en-US" sz="2300" dirty="0"/>
           </a:p>
@@ -4884,8 +4957,8 @@
         </p:blipFill>
         <p:spPr>
           <a:xfrm>
-            <a:off x="7635240" y="1828800"/>
-            <a:ext cx="3867912" cy="4160520"/>
+            <a:off x="7936992" y="2240280"/>
+            <a:ext cx="3566160" cy="3831336"/>
           </a:xfrm>
           <a:prstGeom prst="rect">
             <a:avLst/>
@@ -4907,7 +4980,7 @@
         </p:nvSpPr>
         <p:spPr>
           <a:xfrm>
-            <a:off x="685800" y="5440680"/>
+            <a:off x="685800" y="5669280"/>
             <a:ext cx="6675120" cy="822960"/>
           </a:xfrm>
           <a:prstGeom prst="rect">
@@ -5017,7 +5090,7 @@
         </p:nvSpPr>
         <p:spPr>
           <a:xfrm>
-            <a:off x="685800" y="914400"/>
+            <a:off x="685800" y="960120"/>
             <a:ext cx="10607040" cy="822960"/>
           </a:xfrm>
           <a:prstGeom prst="rect">
@@ -5056,7 +5129,7 @@
         </p:nvSpPr>
         <p:spPr>
           <a:xfrm>
-            <a:off x="685800" y="2286000"/>
+            <a:off x="685800" y="2240280"/>
             <a:ext cx="3364992" cy="1874520"/>
           </a:xfrm>
           <a:prstGeom prst="roundRect">
@@ -5083,7 +5156,7 @@
         </p:nvSpPr>
         <p:spPr>
           <a:xfrm>
-            <a:off x="1097280" y="2560320"/>
+            <a:off x="1097280" y="2514600"/>
             <a:ext cx="2651760" cy="822960"/>
           </a:xfrm>
           <a:prstGeom prst="rect">
@@ -5122,7 +5195,7 @@
         </p:nvSpPr>
         <p:spPr>
           <a:xfrm>
-            <a:off x="1097280" y="3429000"/>
+            <a:off x="1097280" y="3383280"/>
             <a:ext cx="2697480" cy="365760"/>
           </a:xfrm>
           <a:prstGeom prst="rect">
@@ -5161,7 +5234,7 @@
         </p:nvSpPr>
         <p:spPr>
           <a:xfrm>
-            <a:off x="4306824" y="2286000"/>
+            <a:off x="4306824" y="2240280"/>
             <a:ext cx="3364992" cy="1874520"/>
           </a:xfrm>
           <a:prstGeom prst="roundRect">
@@ -5188,7 +5261,7 @@
         </p:nvSpPr>
         <p:spPr>
           <a:xfrm>
-            <a:off x="4718304" y="2560320"/>
+            <a:off x="4718304" y="2514600"/>
             <a:ext cx="2651760" cy="822960"/>
           </a:xfrm>
           <a:prstGeom prst="rect">
@@ -5227,7 +5300,7 @@
         </p:nvSpPr>
         <p:spPr>
           <a:xfrm>
-            <a:off x="4718304" y="3429000"/>
+            <a:off x="4718304" y="3383280"/>
             <a:ext cx="2697480" cy="365760"/>
           </a:xfrm>
           <a:prstGeom prst="rect">
@@ -5266,7 +5339,7 @@
         </p:nvSpPr>
         <p:spPr>
           <a:xfrm>
-            <a:off x="7927848" y="2286000"/>
+            <a:off x="7927848" y="2240280"/>
             <a:ext cx="3364992" cy="1874520"/>
           </a:xfrm>
           <a:prstGeom prst="roundRect">
@@ -5293,7 +5366,7 @@
         </p:nvSpPr>
         <p:spPr>
           <a:xfrm>
-            <a:off x="8339328" y="2560320"/>
+            <a:off x="8339328" y="2514600"/>
             <a:ext cx="2651760" cy="822960"/>
           </a:xfrm>
           <a:prstGeom prst="rect">
@@ -5332,7 +5405,7 @@
         </p:nvSpPr>
         <p:spPr>
           <a:xfrm>
-            <a:off x="8339328" y="3429000"/>
+            <a:off x="8339328" y="3383280"/>
             <a:ext cx="2697480" cy="365760"/>
           </a:xfrm>
           <a:prstGeom prst="rect">
